--- a/prompt-engineering-course/prompt_engineering_presentation_support/PE_S1_foundations.pptx
+++ b/prompt-engineering-course/prompt_engineering_presentation_support/PE_S1_foundations.pptx
@@ -2495,8 +2495,47 @@
         </p:nvSpPr>
         <p:spPr>
           <a:xfrm>
-            <a:off x="548640" y="2011680"/>
-            <a:ext cx="6126480" cy="3840480"/>
+            <a:off x="548640" y="1627632"/>
+            <a:ext cx="10881360" cy="502920"/>
+          </a:xfrm>
+          <a:prstGeom prst="rect">
+            <a:avLst/>
+          </a:prstGeom>
+          <a:noFill/>
+          <a:ln/>
+        </p:spPr>
+        <p:txBody>
+          <a:bodyPr wrap="square" lIns="0" tIns="0" rIns="0" bIns="0" rtlCol="0" anchor="t"/>
+          <a:lstStyle/>
+          <a:p>
+            <a:pPr algn="l" indent="0" marL="0">
+              <a:buNone/>
+            </a:pPr>
+            <a:r>
+              <a:rPr lang="en-US" sz="1500" dirty="0">
+                <a:solidFill>
+                  <a:srgbClr val="A9B1D6"/>
+                </a:solidFill>
+                <a:latin typeface="Calibri" pitchFamily="34" charset="0"/>
+                <a:ea typeface="Calibri" pitchFamily="34" charset="-122"/>
+                <a:cs typeface="Calibri" pitchFamily="34" charset="-120"/>
+              </a:rPr>
+              <a:t>Think of the context window as a fixed desk: everything you want the model to use has to fit on it at once.</a:t>
+            </a:r>
+            <a:endParaRPr lang="en-US" sz="1500" dirty="0"/>
+          </a:p>
+        </p:txBody>
+      </p:sp>
+      <p:sp>
+        <p:nvSpPr>
+          <p:cNvPr id="5" name="Text 3"/>
+          <p:cNvSpPr txBox="1"/>
+          <p:nvPr/>
+        </p:nvSpPr>
+        <p:spPr>
+          <a:xfrm>
+            <a:off x="548640" y="2340864"/>
+            <a:ext cx="6126480" cy="3511296"/>
           </a:xfrm>
           <a:prstGeom prst="rect">
             <a:avLst/>
@@ -2634,18 +2673,18 @@
       </p:sp>
       <p:sp>
         <p:nvSpPr>
-          <p:cNvPr id="5" name="Shape 3"/>
+          <p:cNvPr id="6" name="Shape 4"/>
           <p:cNvSpPr/>
           <p:nvPr/>
         </p:nvSpPr>
         <p:spPr>
           <a:xfrm>
-            <a:off x="6995160" y="2148840"/>
-            <a:ext cx="4645152" cy="3383280"/>
+            <a:off x="6995160" y="2478024"/>
+            <a:ext cx="4645152" cy="3054096"/>
           </a:xfrm>
           <a:prstGeom prst="roundRect">
             <a:avLst>
-              <a:gd name="adj" fmla="val 2432"/>
+              <a:gd name="adj" fmla="val 2695"/>
             </a:avLst>
           </a:prstGeom>
           <a:solidFill>
@@ -2661,13 +2700,13 @@
       </p:sp>
       <p:sp>
         <p:nvSpPr>
-          <p:cNvPr id="6" name="Shape 4"/>
+          <p:cNvPr id="7" name="Shape 5"/>
           <p:cNvSpPr/>
           <p:nvPr/>
         </p:nvSpPr>
         <p:spPr>
           <a:xfrm>
-            <a:off x="7269480" y="2423160"/>
+            <a:off x="7269480" y="2752344"/>
             <a:ext cx="457200" cy="457200"/>
           </a:xfrm>
           <a:prstGeom prst="ellipse">
@@ -2681,13 +2720,13 @@
       </p:sp>
       <p:sp>
         <p:nvSpPr>
-          <p:cNvPr id="7" name="Text 5"/>
-          <p:cNvSpPr txBox="1"/>
-          <p:nvPr/>
-        </p:nvSpPr>
-        <p:spPr>
-          <a:xfrm>
-            <a:off x="7818120" y="2450592"/>
+          <p:cNvPr id="8" name="Text 6"/>
+          <p:cNvSpPr txBox="1"/>
+          <p:nvPr/>
+        </p:nvSpPr>
+        <p:spPr>
+          <a:xfrm>
+            <a:off x="7818120" y="2779776"/>
             <a:ext cx="3657600" cy="411480"/>
           </a:xfrm>
           <a:prstGeom prst="rect">
@@ -2720,14 +2759,14 @@
       </p:sp>
       <p:sp>
         <p:nvSpPr>
-          <p:cNvPr id="8" name="Text 6"/>
-          <p:cNvSpPr txBox="1"/>
-          <p:nvPr/>
-        </p:nvSpPr>
-        <p:spPr>
-          <a:xfrm>
-            <a:off x="7269480" y="3108960"/>
-            <a:ext cx="4160520" cy="2286000"/>
+          <p:cNvPr id="9" name="Text 7"/>
+          <p:cNvSpPr txBox="1"/>
+          <p:nvPr/>
+        </p:nvSpPr>
+        <p:spPr>
+          <a:xfrm>
+            <a:off x="7269480" y="3438144"/>
+            <a:ext cx="4160520" cy="1865376"/>
           </a:xfrm>
           <a:prstGeom prst="rect">
             <a:avLst/>
@@ -2759,7 +2798,7 @@
       </p:sp>
       <p:sp>
         <p:nvSpPr>
-          <p:cNvPr id="9" name="Shape 7"/>
+          <p:cNvPr id="10" name="Shape 8"/>
           <p:cNvSpPr/>
           <p:nvPr/>
         </p:nvSpPr>
@@ -2781,7 +2820,7 @@
       </p:sp>
       <p:sp>
         <p:nvSpPr>
-          <p:cNvPr id="10" name="Text 8"/>
+          <p:cNvPr id="11" name="Text 9"/>
           <p:cNvSpPr txBox="1"/>
           <p:nvPr/>
         </p:nvSpPr>
@@ -2820,7 +2859,7 @@
       </p:sp>
       <p:sp>
         <p:nvSpPr>
-          <p:cNvPr id="11" name="Text 9"/>
+          <p:cNvPr id="12" name="Text 10"/>
           <p:cNvSpPr txBox="1"/>
           <p:nvPr/>
         </p:nvSpPr>
@@ -2859,7 +2898,7 @@
       </p:sp>
       <p:sp>
         <p:nvSpPr>
-          <p:cNvPr id="12" name="Text 10"/>
+          <p:cNvPr id="13" name="Text 11"/>
           <p:cNvSpPr txBox="1"/>
           <p:nvPr/>
         </p:nvSpPr>
@@ -3014,8 +3053,47 @@
         </p:nvSpPr>
         <p:spPr>
           <a:xfrm>
-            <a:off x="548640" y="2011680"/>
-            <a:ext cx="6126480" cy="3840480"/>
+            <a:off x="548640" y="1627632"/>
+            <a:ext cx="10881360" cy="502920"/>
+          </a:xfrm>
+          <a:prstGeom prst="rect">
+            <a:avLst/>
+          </a:prstGeom>
+          <a:noFill/>
+          <a:ln/>
+        </p:spPr>
+        <p:txBody>
+          <a:bodyPr wrap="square" lIns="0" tIns="0" rIns="0" bIns="0" rtlCol="0" anchor="t"/>
+          <a:lstStyle/>
+          <a:p>
+            <a:pPr algn="l" indent="0" marL="0">
+              <a:buNone/>
+            </a:pPr>
+            <a:r>
+              <a:rPr lang="en-US" sz="1500" dirty="0">
+                <a:solidFill>
+                  <a:srgbClr val="A9B1D6"/>
+                </a:solidFill>
+                <a:latin typeface="Calibri" pitchFamily="34" charset="0"/>
+                <a:ea typeface="Calibri" pitchFamily="34" charset="-122"/>
+                <a:cs typeface="Calibri" pitchFamily="34" charset="-120"/>
+              </a:rPr>
+              <a:t>Once you see the model as a plausibility engine, confident wrong answers stop being mysterious and start being manageable.</a:t>
+            </a:r>
+            <a:endParaRPr lang="en-US" sz="1500" dirty="0"/>
+          </a:p>
+        </p:txBody>
+      </p:sp>
+      <p:sp>
+        <p:nvSpPr>
+          <p:cNvPr id="5" name="Text 3"/>
+          <p:cNvSpPr txBox="1"/>
+          <p:nvPr/>
+        </p:nvSpPr>
+        <p:spPr>
+          <a:xfrm>
+            <a:off x="548640" y="2340864"/>
+            <a:ext cx="6126480" cy="3511296"/>
           </a:xfrm>
           <a:prstGeom prst="rect">
             <a:avLst/>
@@ -3153,18 +3231,18 @@
       </p:sp>
       <p:sp>
         <p:nvSpPr>
-          <p:cNvPr id="5" name="Shape 3"/>
+          <p:cNvPr id="6" name="Shape 4"/>
           <p:cNvSpPr/>
           <p:nvPr/>
         </p:nvSpPr>
         <p:spPr>
           <a:xfrm>
-            <a:off x="6995160" y="2148840"/>
-            <a:ext cx="4645152" cy="3383280"/>
+            <a:off x="6995160" y="2478024"/>
+            <a:ext cx="4645152" cy="3054096"/>
           </a:xfrm>
           <a:prstGeom prst="roundRect">
             <a:avLst>
-              <a:gd name="adj" fmla="val 2432"/>
+              <a:gd name="adj" fmla="val 2695"/>
             </a:avLst>
           </a:prstGeom>
           <a:solidFill>
@@ -3180,13 +3258,13 @@
       </p:sp>
       <p:sp>
         <p:nvSpPr>
-          <p:cNvPr id="6" name="Shape 4"/>
+          <p:cNvPr id="7" name="Shape 5"/>
           <p:cNvSpPr/>
           <p:nvPr/>
         </p:nvSpPr>
         <p:spPr>
           <a:xfrm>
-            <a:off x="7269480" y="2423160"/>
+            <a:off x="7269480" y="2752344"/>
             <a:ext cx="457200" cy="457200"/>
           </a:xfrm>
           <a:prstGeom prst="ellipse">
@@ -3200,13 +3278,13 @@
       </p:sp>
       <p:sp>
         <p:nvSpPr>
-          <p:cNvPr id="7" name="Text 5"/>
-          <p:cNvSpPr txBox="1"/>
-          <p:nvPr/>
-        </p:nvSpPr>
-        <p:spPr>
-          <a:xfrm>
-            <a:off x="7818120" y="2450592"/>
+          <p:cNvPr id="8" name="Text 6"/>
+          <p:cNvSpPr txBox="1"/>
+          <p:nvPr/>
+        </p:nvSpPr>
+        <p:spPr>
+          <a:xfrm>
+            <a:off x="7818120" y="2779776"/>
             <a:ext cx="3657600" cy="411480"/>
           </a:xfrm>
           <a:prstGeom prst="rect">
@@ -3239,14 +3317,14 @@
       </p:sp>
       <p:sp>
         <p:nvSpPr>
-          <p:cNvPr id="8" name="Text 6"/>
-          <p:cNvSpPr txBox="1"/>
-          <p:nvPr/>
-        </p:nvSpPr>
-        <p:spPr>
-          <a:xfrm>
-            <a:off x="7269480" y="3108960"/>
-            <a:ext cx="4160520" cy="2286000"/>
+          <p:cNvPr id="9" name="Text 7"/>
+          <p:cNvSpPr txBox="1"/>
+          <p:nvPr/>
+        </p:nvSpPr>
+        <p:spPr>
+          <a:xfrm>
+            <a:off x="7269480" y="3438144"/>
+            <a:ext cx="4160520" cy="1865376"/>
           </a:xfrm>
           <a:prstGeom prst="rect">
             <a:avLst/>
@@ -3278,7 +3356,7 @@
       </p:sp>
       <p:sp>
         <p:nvSpPr>
-          <p:cNvPr id="9" name="Shape 7"/>
+          <p:cNvPr id="10" name="Shape 8"/>
           <p:cNvSpPr/>
           <p:nvPr/>
         </p:nvSpPr>
@@ -3300,7 +3378,7 @@
       </p:sp>
       <p:sp>
         <p:nvSpPr>
-          <p:cNvPr id="10" name="Text 8"/>
+          <p:cNvPr id="11" name="Text 9"/>
           <p:cNvSpPr txBox="1"/>
           <p:nvPr/>
         </p:nvSpPr>
@@ -3339,7 +3417,7 @@
       </p:sp>
       <p:sp>
         <p:nvSpPr>
-          <p:cNvPr id="11" name="Text 9"/>
+          <p:cNvPr id="12" name="Text 10"/>
           <p:cNvSpPr txBox="1"/>
           <p:nvPr/>
         </p:nvSpPr>
@@ -3378,7 +3456,7 @@
       </p:sp>
       <p:sp>
         <p:nvSpPr>
-          <p:cNvPr id="12" name="Text 10"/>
+          <p:cNvPr id="13" name="Text 11"/>
           <p:cNvSpPr txBox="1"/>
           <p:nvPr/>
         </p:nvSpPr>
@@ -3527,13 +3605,52 @@
       </p:sp>
       <p:sp>
         <p:nvSpPr>
-          <p:cNvPr id="4" name="Shape 2"/>
+          <p:cNvPr id="4" name="Text 2"/>
+          <p:cNvSpPr txBox="1"/>
+          <p:nvPr/>
+        </p:nvSpPr>
+        <p:spPr>
+          <a:xfrm>
+            <a:off x="548640" y="1627632"/>
+            <a:ext cx="10881360" cy="502920"/>
+          </a:xfrm>
+          <a:prstGeom prst="rect">
+            <a:avLst/>
+          </a:prstGeom>
+          <a:noFill/>
+          <a:ln/>
+        </p:spPr>
+        <p:txBody>
+          <a:bodyPr wrap="square" lIns="0" tIns="0" rIns="0" bIns="0" rtlCol="0" anchor="t"/>
+          <a:lstStyle/>
+          <a:p>
+            <a:pPr algn="l" indent="0" marL="0">
+              <a:buNone/>
+            </a:pPr>
+            <a:r>
+              <a:rPr lang="en-US" sz="1500" dirty="0">
+                <a:solidFill>
+                  <a:srgbClr val="A9B1D6"/>
+                </a:solidFill>
+                <a:latin typeface="Calibri" pitchFamily="34" charset="0"/>
+                <a:ea typeface="Calibri" pitchFamily="34" charset="-122"/>
+                <a:cs typeface="Calibri" pitchFamily="34" charset="-120"/>
+              </a:rPr>
+              <a:t>A prompt isn't one blob of text; it's a little conversation with distinct parts, and naming them gives you control.</a:t>
+            </a:r>
+            <a:endParaRPr lang="en-US" sz="1500" dirty="0"/>
+          </a:p>
+        </p:txBody>
+      </p:sp>
+      <p:sp>
+        <p:nvSpPr>
+          <p:cNvPr id="5" name="Shape 3"/>
           <p:cNvSpPr/>
           <p:nvPr/>
         </p:nvSpPr>
         <p:spPr>
           <a:xfrm>
-            <a:off x="548640" y="2103120"/>
+            <a:off x="548640" y="2432304"/>
             <a:ext cx="530352" cy="530352"/>
           </a:xfrm>
           <a:prstGeom prst="ellipse">
@@ -3547,13 +3664,13 @@
       </p:sp>
       <p:sp>
         <p:nvSpPr>
-          <p:cNvPr id="5" name="Text 3"/>
-          <p:cNvSpPr txBox="1"/>
-          <p:nvPr/>
-        </p:nvSpPr>
-        <p:spPr>
-          <a:xfrm>
-            <a:off x="548640" y="2103120"/>
+          <p:cNvPr id="6" name="Text 4"/>
+          <p:cNvSpPr txBox="1"/>
+          <p:nvPr/>
+        </p:nvSpPr>
+        <p:spPr>
+          <a:xfrm>
+            <a:off x="548640" y="2432304"/>
             <a:ext cx="530352" cy="530352"/>
           </a:xfrm>
           <a:prstGeom prst="rect">
@@ -3586,13 +3703,13 @@
       </p:sp>
       <p:sp>
         <p:nvSpPr>
-          <p:cNvPr id="6" name="Text 4"/>
-          <p:cNvSpPr txBox="1"/>
-          <p:nvPr/>
-        </p:nvSpPr>
-        <p:spPr>
-          <a:xfrm>
-            <a:off x="1325880" y="2084832"/>
+          <p:cNvPr id="7" name="Text 5"/>
+          <p:cNvSpPr txBox="1"/>
+          <p:nvPr/>
+        </p:nvSpPr>
+        <p:spPr>
+          <a:xfrm>
+            <a:off x="1325880" y="2414016"/>
             <a:ext cx="10424160" cy="411480"/>
           </a:xfrm>
           <a:prstGeom prst="rect">
@@ -3625,13 +3742,13 @@
       </p:sp>
       <p:sp>
         <p:nvSpPr>
-          <p:cNvPr id="7" name="Text 5"/>
-          <p:cNvSpPr txBox="1"/>
-          <p:nvPr/>
-        </p:nvSpPr>
-        <p:spPr>
-          <a:xfrm>
-            <a:off x="1325880" y="2468880"/>
+          <p:cNvPr id="8" name="Text 6"/>
+          <p:cNvSpPr txBox="1"/>
+          <p:nvPr/>
+        </p:nvSpPr>
+        <p:spPr>
+          <a:xfrm>
+            <a:off x="1325880" y="2798064"/>
             <a:ext cx="10424160" cy="667512"/>
           </a:xfrm>
           <a:prstGeom prst="rect">
@@ -3664,13 +3781,13 @@
       </p:sp>
       <p:sp>
         <p:nvSpPr>
-          <p:cNvPr id="8" name="Shape 6"/>
+          <p:cNvPr id="9" name="Shape 7"/>
           <p:cNvSpPr/>
           <p:nvPr/>
         </p:nvSpPr>
         <p:spPr>
           <a:xfrm>
-            <a:off x="548640" y="3209544"/>
+            <a:off x="548640" y="3538728"/>
             <a:ext cx="530352" cy="530352"/>
           </a:xfrm>
           <a:prstGeom prst="ellipse">
@@ -3684,13 +3801,13 @@
       </p:sp>
       <p:sp>
         <p:nvSpPr>
-          <p:cNvPr id="9" name="Text 7"/>
-          <p:cNvSpPr txBox="1"/>
-          <p:nvPr/>
-        </p:nvSpPr>
-        <p:spPr>
-          <a:xfrm>
-            <a:off x="548640" y="3209544"/>
+          <p:cNvPr id="10" name="Text 8"/>
+          <p:cNvSpPr txBox="1"/>
+          <p:nvPr/>
+        </p:nvSpPr>
+        <p:spPr>
+          <a:xfrm>
+            <a:off x="548640" y="3538728"/>
             <a:ext cx="530352" cy="530352"/>
           </a:xfrm>
           <a:prstGeom prst="rect">
@@ -3723,13 +3840,13 @@
       </p:sp>
       <p:sp>
         <p:nvSpPr>
-          <p:cNvPr id="10" name="Text 8"/>
-          <p:cNvSpPr txBox="1"/>
-          <p:nvPr/>
-        </p:nvSpPr>
-        <p:spPr>
-          <a:xfrm>
-            <a:off x="1325880" y="3191256"/>
+          <p:cNvPr id="11" name="Text 9"/>
+          <p:cNvSpPr txBox="1"/>
+          <p:nvPr/>
+        </p:nvSpPr>
+        <p:spPr>
+          <a:xfrm>
+            <a:off x="1325880" y="3520440"/>
             <a:ext cx="10424160" cy="411480"/>
           </a:xfrm>
           <a:prstGeom prst="rect">
@@ -3762,13 +3879,13 @@
       </p:sp>
       <p:sp>
         <p:nvSpPr>
-          <p:cNvPr id="11" name="Text 9"/>
-          <p:cNvSpPr txBox="1"/>
-          <p:nvPr/>
-        </p:nvSpPr>
-        <p:spPr>
-          <a:xfrm>
-            <a:off x="1325880" y="3575304"/>
+          <p:cNvPr id="12" name="Text 10"/>
+          <p:cNvSpPr txBox="1"/>
+          <p:nvPr/>
+        </p:nvSpPr>
+        <p:spPr>
+          <a:xfrm>
+            <a:off x="1325880" y="3904488"/>
             <a:ext cx="10424160" cy="667512"/>
           </a:xfrm>
           <a:prstGeom prst="rect">
@@ -3801,13 +3918,13 @@
       </p:sp>
       <p:sp>
         <p:nvSpPr>
-          <p:cNvPr id="12" name="Shape 10"/>
+          <p:cNvPr id="13" name="Shape 11"/>
           <p:cNvSpPr/>
           <p:nvPr/>
         </p:nvSpPr>
         <p:spPr>
           <a:xfrm>
-            <a:off x="548640" y="4315968"/>
+            <a:off x="548640" y="4645152"/>
             <a:ext cx="530352" cy="530352"/>
           </a:xfrm>
           <a:prstGeom prst="ellipse">
@@ -3821,13 +3938,13 @@
       </p:sp>
       <p:sp>
         <p:nvSpPr>
-          <p:cNvPr id="13" name="Text 11"/>
-          <p:cNvSpPr txBox="1"/>
-          <p:nvPr/>
-        </p:nvSpPr>
-        <p:spPr>
-          <a:xfrm>
-            <a:off x="548640" y="4315968"/>
+          <p:cNvPr id="14" name="Text 12"/>
+          <p:cNvSpPr txBox="1"/>
+          <p:nvPr/>
+        </p:nvSpPr>
+        <p:spPr>
+          <a:xfrm>
+            <a:off x="548640" y="4645152"/>
             <a:ext cx="530352" cy="530352"/>
           </a:xfrm>
           <a:prstGeom prst="rect">
@@ -3860,13 +3977,13 @@
       </p:sp>
       <p:sp>
         <p:nvSpPr>
-          <p:cNvPr id="14" name="Text 12"/>
-          <p:cNvSpPr txBox="1"/>
-          <p:nvPr/>
-        </p:nvSpPr>
-        <p:spPr>
-          <a:xfrm>
-            <a:off x="1325880" y="4297680"/>
+          <p:cNvPr id="15" name="Text 13"/>
+          <p:cNvSpPr txBox="1"/>
+          <p:nvPr/>
+        </p:nvSpPr>
+        <p:spPr>
+          <a:xfrm>
+            <a:off x="1325880" y="4626864"/>
             <a:ext cx="10424160" cy="411480"/>
           </a:xfrm>
           <a:prstGeom prst="rect">
@@ -3899,13 +4016,13 @@
       </p:sp>
       <p:sp>
         <p:nvSpPr>
-          <p:cNvPr id="15" name="Text 13"/>
-          <p:cNvSpPr txBox="1"/>
-          <p:nvPr/>
-        </p:nvSpPr>
-        <p:spPr>
-          <a:xfrm>
-            <a:off x="1325880" y="4681728"/>
+          <p:cNvPr id="16" name="Text 14"/>
+          <p:cNvSpPr txBox="1"/>
+          <p:nvPr/>
+        </p:nvSpPr>
+        <p:spPr>
+          <a:xfrm>
+            <a:off x="1325880" y="5010912"/>
             <a:ext cx="10424160" cy="667512"/>
           </a:xfrm>
           <a:prstGeom prst="rect">
@@ -3938,7 +4055,7 @@
       </p:sp>
       <p:sp>
         <p:nvSpPr>
-          <p:cNvPr id="16" name="Shape 14"/>
+          <p:cNvPr id="17" name="Shape 15"/>
           <p:cNvSpPr/>
           <p:nvPr/>
         </p:nvSpPr>
@@ -3960,7 +4077,7 @@
       </p:sp>
       <p:sp>
         <p:nvSpPr>
-          <p:cNvPr id="17" name="Text 15"/>
+          <p:cNvPr id="18" name="Text 16"/>
           <p:cNvSpPr txBox="1"/>
           <p:nvPr/>
         </p:nvSpPr>
@@ -3999,7 +4116,7 @@
       </p:sp>
       <p:sp>
         <p:nvSpPr>
-          <p:cNvPr id="18" name="Text 16"/>
+          <p:cNvPr id="19" name="Text 17"/>
           <p:cNvSpPr txBox="1"/>
           <p:nvPr/>
         </p:nvSpPr>
@@ -4038,7 +4155,7 @@
       </p:sp>
       <p:sp>
         <p:nvSpPr>
-          <p:cNvPr id="19" name="Text 17"/>
+          <p:cNvPr id="20" name="Text 18"/>
           <p:cNvSpPr txBox="1"/>
           <p:nvPr/>
         </p:nvSpPr>
@@ -4187,18 +4304,57 @@
       </p:sp>
       <p:sp>
         <p:nvSpPr>
-          <p:cNvPr id="4" name="Shape 2"/>
+          <p:cNvPr id="4" name="Text 2"/>
+          <p:cNvSpPr txBox="1"/>
+          <p:nvPr/>
+        </p:nvSpPr>
+        <p:spPr>
+          <a:xfrm>
+            <a:off x="548640" y="1627632"/>
+            <a:ext cx="10881360" cy="502920"/>
+          </a:xfrm>
+          <a:prstGeom prst="rect">
+            <a:avLst/>
+          </a:prstGeom>
+          <a:noFill/>
+          <a:ln/>
+        </p:spPr>
+        <p:txBody>
+          <a:bodyPr wrap="square" lIns="0" tIns="0" rIns="0" bIns="0" rtlCol="0" anchor="t"/>
+          <a:lstStyle/>
+          <a:p>
+            <a:pPr algn="l" indent="0" marL="0">
+              <a:buNone/>
+            </a:pPr>
+            <a:r>
+              <a:rPr lang="en-US" sz="1500" dirty="0">
+                <a:solidFill>
+                  <a:srgbClr val="A9B1D6"/>
+                </a:solidFill>
+                <a:latin typeface="Calibri" pitchFamily="34" charset="0"/>
+                <a:ea typeface="Calibri" pitchFamily="34" charset="-122"/>
+                <a:cs typeface="Calibri" pitchFamily="34" charset="-120"/>
+              </a:rPr>
+              <a:t>Let's watch specificity do its work — the same request, two very different results.</a:t>
+            </a:r>
+            <a:endParaRPr lang="en-US" sz="1500" dirty="0"/>
+          </a:p>
+        </p:txBody>
+      </p:sp>
+      <p:sp>
+        <p:nvSpPr>
+          <p:cNvPr id="5" name="Shape 3"/>
           <p:cNvSpPr/>
           <p:nvPr/>
         </p:nvSpPr>
         <p:spPr>
           <a:xfrm>
-            <a:off x="548640" y="2103120"/>
-            <a:ext cx="5440680" cy="3703320"/>
+            <a:off x="548640" y="2432304"/>
+            <a:ext cx="5440680" cy="3374136"/>
           </a:xfrm>
           <a:prstGeom prst="roundRect">
             <a:avLst>
-              <a:gd name="adj" fmla="val 2222"/>
+              <a:gd name="adj" fmla="val 2439"/>
             </a:avLst>
           </a:prstGeom>
           <a:solidFill>
@@ -4214,13 +4370,13 @@
       </p:sp>
       <p:sp>
         <p:nvSpPr>
-          <p:cNvPr id="5" name="Shape 3"/>
+          <p:cNvPr id="6" name="Shape 4"/>
           <p:cNvSpPr/>
           <p:nvPr/>
         </p:nvSpPr>
         <p:spPr>
           <a:xfrm>
-            <a:off x="822960" y="2395728"/>
+            <a:off x="822960" y="2724912"/>
             <a:ext cx="457200" cy="457200"/>
           </a:xfrm>
           <a:prstGeom prst="ellipse">
@@ -4234,13 +4390,13 @@
       </p:sp>
       <p:sp>
         <p:nvSpPr>
-          <p:cNvPr id="6" name="Text 4"/>
-          <p:cNvSpPr txBox="1"/>
-          <p:nvPr/>
-        </p:nvSpPr>
-        <p:spPr>
-          <a:xfrm>
-            <a:off x="822960" y="2395728"/>
+          <p:cNvPr id="7" name="Text 5"/>
+          <p:cNvSpPr txBox="1"/>
+          <p:nvPr/>
+        </p:nvSpPr>
+        <p:spPr>
+          <a:xfrm>
+            <a:off x="822960" y="2724912"/>
             <a:ext cx="457200" cy="457200"/>
           </a:xfrm>
           <a:prstGeom prst="rect">
@@ -4273,13 +4429,13 @@
       </p:sp>
       <p:sp>
         <p:nvSpPr>
-          <p:cNvPr id="7" name="Text 5"/>
-          <p:cNvSpPr txBox="1"/>
-          <p:nvPr/>
-        </p:nvSpPr>
-        <p:spPr>
-          <a:xfrm>
-            <a:off x="1417320" y="2359152"/>
+          <p:cNvPr id="8" name="Text 6"/>
+          <p:cNvSpPr txBox="1"/>
+          <p:nvPr/>
+        </p:nvSpPr>
+        <p:spPr>
+          <a:xfrm>
+            <a:off x="1417320" y="2688336"/>
             <a:ext cx="4343400" cy="548640"/>
           </a:xfrm>
           <a:prstGeom prst="rect">
@@ -4312,14 +4468,14 @@
       </p:sp>
       <p:sp>
         <p:nvSpPr>
-          <p:cNvPr id="8" name="Text 6"/>
-          <p:cNvSpPr txBox="1"/>
-          <p:nvPr/>
-        </p:nvSpPr>
-        <p:spPr>
-          <a:xfrm>
-            <a:off x="868680" y="3063240"/>
-            <a:ext cx="4800600" cy="2560320"/>
+          <p:cNvPr id="9" name="Text 7"/>
+          <p:cNvSpPr txBox="1"/>
+          <p:nvPr/>
+        </p:nvSpPr>
+        <p:spPr>
+          <a:xfrm>
+            <a:off x="868680" y="3392424"/>
+            <a:ext cx="4800600" cy="2231136"/>
           </a:xfrm>
           <a:prstGeom prst="rect">
             <a:avLst/>
@@ -4439,18 +4595,18 @@
       </p:sp>
       <p:sp>
         <p:nvSpPr>
-          <p:cNvPr id="9" name="Shape 7"/>
+          <p:cNvPr id="10" name="Shape 8"/>
           <p:cNvSpPr/>
           <p:nvPr/>
         </p:nvSpPr>
         <p:spPr>
           <a:xfrm>
-            <a:off x="6199632" y="2103120"/>
-            <a:ext cx="5440680" cy="3703320"/>
+            <a:off x="6199632" y="2432304"/>
+            <a:ext cx="5440680" cy="3374136"/>
           </a:xfrm>
           <a:prstGeom prst="roundRect">
             <a:avLst>
-              <a:gd name="adj" fmla="val 2222"/>
+              <a:gd name="adj" fmla="val 2439"/>
             </a:avLst>
           </a:prstGeom>
           <a:solidFill>
@@ -4466,13 +4622,13 @@
       </p:sp>
       <p:sp>
         <p:nvSpPr>
-          <p:cNvPr id="10" name="Shape 8"/>
+          <p:cNvPr id="11" name="Shape 9"/>
           <p:cNvSpPr/>
           <p:nvPr/>
         </p:nvSpPr>
         <p:spPr>
           <a:xfrm>
-            <a:off x="6473952" y="2395728"/>
+            <a:off x="6473952" y="2724912"/>
             <a:ext cx="457200" cy="457200"/>
           </a:xfrm>
           <a:prstGeom prst="ellipse">
@@ -4486,13 +4642,13 @@
       </p:sp>
       <p:sp>
         <p:nvSpPr>
-          <p:cNvPr id="11" name="Text 9"/>
-          <p:cNvSpPr txBox="1"/>
-          <p:nvPr/>
-        </p:nvSpPr>
-        <p:spPr>
-          <a:xfrm>
-            <a:off x="6473952" y="2395728"/>
+          <p:cNvPr id="12" name="Text 10"/>
+          <p:cNvSpPr txBox="1"/>
+          <p:nvPr/>
+        </p:nvSpPr>
+        <p:spPr>
+          <a:xfrm>
+            <a:off x="6473952" y="2724912"/>
             <a:ext cx="457200" cy="457200"/>
           </a:xfrm>
           <a:prstGeom prst="rect">
@@ -4525,13 +4681,13 @@
       </p:sp>
       <p:sp>
         <p:nvSpPr>
-          <p:cNvPr id="12" name="Text 10"/>
-          <p:cNvSpPr txBox="1"/>
-          <p:nvPr/>
-        </p:nvSpPr>
-        <p:spPr>
-          <a:xfrm>
-            <a:off x="7068312" y="2359152"/>
+          <p:cNvPr id="13" name="Text 11"/>
+          <p:cNvSpPr txBox="1"/>
+          <p:nvPr/>
+        </p:nvSpPr>
+        <p:spPr>
+          <a:xfrm>
+            <a:off x="7068312" y="2688336"/>
             <a:ext cx="4343400" cy="548640"/>
           </a:xfrm>
           <a:prstGeom prst="rect">
@@ -4564,14 +4720,14 @@
       </p:sp>
       <p:sp>
         <p:nvSpPr>
-          <p:cNvPr id="13" name="Text 11"/>
-          <p:cNvSpPr txBox="1"/>
-          <p:nvPr/>
-        </p:nvSpPr>
-        <p:spPr>
-          <a:xfrm>
-            <a:off x="6519672" y="3063240"/>
-            <a:ext cx="4800600" cy="2560320"/>
+          <p:cNvPr id="14" name="Text 12"/>
+          <p:cNvSpPr txBox="1"/>
+          <p:nvPr/>
+        </p:nvSpPr>
+        <p:spPr>
+          <a:xfrm>
+            <a:off x="6519672" y="3392424"/>
+            <a:ext cx="4800600" cy="2231136"/>
           </a:xfrm>
           <a:prstGeom prst="rect">
             <a:avLst/>
@@ -4691,7 +4847,7 @@
       </p:sp>
       <p:sp>
         <p:nvSpPr>
-          <p:cNvPr id="14" name="Shape 12"/>
+          <p:cNvPr id="15" name="Shape 13"/>
           <p:cNvSpPr/>
           <p:nvPr/>
         </p:nvSpPr>
@@ -4713,7 +4869,7 @@
       </p:sp>
       <p:sp>
         <p:nvSpPr>
-          <p:cNvPr id="15" name="Text 13"/>
+          <p:cNvPr id="16" name="Text 14"/>
           <p:cNvSpPr txBox="1"/>
           <p:nvPr/>
         </p:nvSpPr>
@@ -4752,7 +4908,7 @@
       </p:sp>
       <p:sp>
         <p:nvSpPr>
-          <p:cNvPr id="16" name="Text 14"/>
+          <p:cNvPr id="17" name="Text 15"/>
           <p:cNvSpPr txBox="1"/>
           <p:nvPr/>
         </p:nvSpPr>
@@ -4791,7 +4947,7 @@
       </p:sp>
       <p:sp>
         <p:nvSpPr>
-          <p:cNvPr id="17" name="Text 15"/>
+          <p:cNvPr id="18" name="Text 16"/>
           <p:cNvSpPr txBox="1"/>
           <p:nvPr/>
         </p:nvSpPr>
@@ -7186,13 +7342,52 @@
       </p:sp>
       <p:sp>
         <p:nvSpPr>
-          <p:cNvPr id="4" name="Shape 2"/>
+          <p:cNvPr id="4" name="Text 2"/>
+          <p:cNvSpPr txBox="1"/>
+          <p:nvPr/>
+        </p:nvSpPr>
+        <p:spPr>
+          <a:xfrm>
+            <a:off x="548640" y="1627632"/>
+            <a:ext cx="10881360" cy="502920"/>
+          </a:xfrm>
+          <a:prstGeom prst="rect">
+            <a:avLst/>
+          </a:prstGeom>
+          <a:noFill/>
+          <a:ln/>
+        </p:spPr>
+        <p:txBody>
+          <a:bodyPr wrap="square" lIns="0" tIns="0" rIns="0" bIns="0" rtlCol="0" anchor="t"/>
+          <a:lstStyle/>
+          <a:p>
+            <a:pPr algn="l" indent="0" marL="0">
+              <a:buNone/>
+            </a:pPr>
+            <a:r>
+              <a:rPr lang="en-US" sz="1500" dirty="0">
+                <a:solidFill>
+                  <a:srgbClr val="A9B1D6"/>
+                </a:solidFill>
+                <a:latin typeface="Calibri" pitchFamily="34" charset="0"/>
+                <a:ea typeface="Calibri" pitchFamily="34" charset="-122"/>
+                <a:cs typeface="Calibri" pitchFamily="34" charset="-120"/>
+              </a:rPr>
+              <a:t>Here's the shape of the whole journey, so you always know where a given day fits.</a:t>
+            </a:r>
+            <a:endParaRPr lang="en-US" sz="1500" dirty="0"/>
+          </a:p>
+        </p:txBody>
+      </p:sp>
+      <p:sp>
+        <p:nvSpPr>
+          <p:cNvPr id="5" name="Shape 3"/>
           <p:cNvSpPr/>
           <p:nvPr/>
         </p:nvSpPr>
         <p:spPr>
           <a:xfrm>
-            <a:off x="548640" y="2103120"/>
+            <a:off x="548640" y="2432304"/>
             <a:ext cx="5394960" cy="1810512"/>
           </a:xfrm>
           <a:prstGeom prst="roundRect">
@@ -7213,13 +7408,13 @@
       </p:sp>
       <p:sp>
         <p:nvSpPr>
-          <p:cNvPr id="5" name="Shape 3"/>
+          <p:cNvPr id="6" name="Shape 4"/>
           <p:cNvSpPr/>
           <p:nvPr/>
         </p:nvSpPr>
         <p:spPr>
           <a:xfrm>
-            <a:off x="822960" y="2395728"/>
+            <a:off x="822960" y="2724912"/>
             <a:ext cx="548640" cy="548640"/>
           </a:xfrm>
           <a:prstGeom prst="ellipse">
@@ -7233,13 +7428,13 @@
       </p:sp>
       <p:sp>
         <p:nvSpPr>
-          <p:cNvPr id="6" name="Text 4"/>
-          <p:cNvSpPr txBox="1"/>
-          <p:nvPr/>
-        </p:nvSpPr>
-        <p:spPr>
-          <a:xfrm>
-            <a:off x="822960" y="2395728"/>
+          <p:cNvPr id="7" name="Text 5"/>
+          <p:cNvSpPr txBox="1"/>
+          <p:nvPr/>
+        </p:nvSpPr>
+        <p:spPr>
+          <a:xfrm>
+            <a:off x="822960" y="2724912"/>
             <a:ext cx="548640" cy="548640"/>
           </a:xfrm>
           <a:prstGeom prst="rect">
@@ -7272,13 +7467,13 @@
       </p:sp>
       <p:sp>
         <p:nvSpPr>
-          <p:cNvPr id="7" name="Text 5"/>
-          <p:cNvSpPr txBox="1"/>
-          <p:nvPr/>
-        </p:nvSpPr>
-        <p:spPr>
-          <a:xfrm>
-            <a:off x="1508760" y="2359152"/>
+          <p:cNvPr id="8" name="Text 6"/>
+          <p:cNvSpPr txBox="1"/>
+          <p:nvPr/>
+        </p:nvSpPr>
+        <p:spPr>
+          <a:xfrm>
+            <a:off x="1508760" y="2688336"/>
             <a:ext cx="4206240" cy="548640"/>
           </a:xfrm>
           <a:prstGeom prst="rect">
@@ -7311,13 +7506,13 @@
       </p:sp>
       <p:sp>
         <p:nvSpPr>
-          <p:cNvPr id="8" name="Text 6"/>
-          <p:cNvSpPr txBox="1"/>
-          <p:nvPr/>
-        </p:nvSpPr>
-        <p:spPr>
-          <a:xfrm>
-            <a:off x="822960" y="3017520"/>
+          <p:cNvPr id="9" name="Text 7"/>
+          <p:cNvSpPr txBox="1"/>
+          <p:nvPr/>
+        </p:nvSpPr>
+        <p:spPr>
+          <a:xfrm>
+            <a:off x="822960" y="3346704"/>
             <a:ext cx="4846320" cy="822960"/>
           </a:xfrm>
           <a:prstGeom prst="rect">
@@ -7350,13 +7545,13 @@
       </p:sp>
       <p:sp>
         <p:nvSpPr>
-          <p:cNvPr id="9" name="Shape 7"/>
+          <p:cNvPr id="10" name="Shape 8"/>
           <p:cNvSpPr/>
           <p:nvPr/>
         </p:nvSpPr>
         <p:spPr>
           <a:xfrm>
-            <a:off x="6245352" y="2103120"/>
+            <a:off x="6245352" y="2432304"/>
             <a:ext cx="5394960" cy="1810512"/>
           </a:xfrm>
           <a:prstGeom prst="roundRect">
@@ -7377,13 +7572,13 @@
       </p:sp>
       <p:sp>
         <p:nvSpPr>
-          <p:cNvPr id="10" name="Shape 8"/>
+          <p:cNvPr id="11" name="Shape 9"/>
           <p:cNvSpPr/>
           <p:nvPr/>
         </p:nvSpPr>
         <p:spPr>
           <a:xfrm>
-            <a:off x="6519672" y="2395728"/>
+            <a:off x="6519672" y="2724912"/>
             <a:ext cx="548640" cy="548640"/>
           </a:xfrm>
           <a:prstGeom prst="ellipse">
@@ -7397,13 +7592,13 @@
       </p:sp>
       <p:sp>
         <p:nvSpPr>
-          <p:cNvPr id="11" name="Text 9"/>
-          <p:cNvSpPr txBox="1"/>
-          <p:nvPr/>
-        </p:nvSpPr>
-        <p:spPr>
-          <a:xfrm>
-            <a:off x="6519672" y="2395728"/>
+          <p:cNvPr id="12" name="Text 10"/>
+          <p:cNvSpPr txBox="1"/>
+          <p:nvPr/>
+        </p:nvSpPr>
+        <p:spPr>
+          <a:xfrm>
+            <a:off x="6519672" y="2724912"/>
             <a:ext cx="548640" cy="548640"/>
           </a:xfrm>
           <a:prstGeom prst="rect">
@@ -7436,13 +7631,13 @@
       </p:sp>
       <p:sp>
         <p:nvSpPr>
-          <p:cNvPr id="12" name="Text 10"/>
-          <p:cNvSpPr txBox="1"/>
-          <p:nvPr/>
-        </p:nvSpPr>
-        <p:spPr>
-          <a:xfrm>
-            <a:off x="7205472" y="2359152"/>
+          <p:cNvPr id="13" name="Text 11"/>
+          <p:cNvSpPr txBox="1"/>
+          <p:nvPr/>
+        </p:nvSpPr>
+        <p:spPr>
+          <a:xfrm>
+            <a:off x="7205472" y="2688336"/>
             <a:ext cx="4206240" cy="548640"/>
           </a:xfrm>
           <a:prstGeom prst="rect">
@@ -7475,13 +7670,13 @@
       </p:sp>
       <p:sp>
         <p:nvSpPr>
-          <p:cNvPr id="13" name="Text 11"/>
-          <p:cNvSpPr txBox="1"/>
-          <p:nvPr/>
-        </p:nvSpPr>
-        <p:spPr>
-          <a:xfrm>
-            <a:off x="6519672" y="3017520"/>
+          <p:cNvPr id="14" name="Text 12"/>
+          <p:cNvSpPr txBox="1"/>
+          <p:nvPr/>
+        </p:nvSpPr>
+        <p:spPr>
+          <a:xfrm>
+            <a:off x="6519672" y="3346704"/>
             <a:ext cx="4846320" cy="822960"/>
           </a:xfrm>
           <a:prstGeom prst="rect">
@@ -7514,13 +7709,13 @@
       </p:sp>
       <p:sp>
         <p:nvSpPr>
-          <p:cNvPr id="14" name="Shape 12"/>
+          <p:cNvPr id="15" name="Shape 13"/>
           <p:cNvSpPr/>
           <p:nvPr/>
         </p:nvSpPr>
         <p:spPr>
           <a:xfrm>
-            <a:off x="548640" y="4114800"/>
+            <a:off x="548640" y="4443984"/>
             <a:ext cx="5394960" cy="1810512"/>
           </a:xfrm>
           <a:prstGeom prst="roundRect">
@@ -7541,13 +7736,13 @@
       </p:sp>
       <p:sp>
         <p:nvSpPr>
-          <p:cNvPr id="15" name="Shape 13"/>
+          <p:cNvPr id="16" name="Shape 14"/>
           <p:cNvSpPr/>
           <p:nvPr/>
         </p:nvSpPr>
         <p:spPr>
           <a:xfrm>
-            <a:off x="822960" y="4407408"/>
+            <a:off x="822960" y="4736592"/>
             <a:ext cx="548640" cy="548640"/>
           </a:xfrm>
           <a:prstGeom prst="ellipse">
@@ -7561,13 +7756,13 @@
       </p:sp>
       <p:sp>
         <p:nvSpPr>
-          <p:cNvPr id="16" name="Text 14"/>
-          <p:cNvSpPr txBox="1"/>
-          <p:nvPr/>
-        </p:nvSpPr>
-        <p:spPr>
-          <a:xfrm>
-            <a:off x="822960" y="4407408"/>
+          <p:cNvPr id="17" name="Text 15"/>
+          <p:cNvSpPr txBox="1"/>
+          <p:nvPr/>
+        </p:nvSpPr>
+        <p:spPr>
+          <a:xfrm>
+            <a:off x="822960" y="4736592"/>
             <a:ext cx="548640" cy="548640"/>
           </a:xfrm>
           <a:prstGeom prst="rect">
@@ -7600,13 +7795,13 @@
       </p:sp>
       <p:sp>
         <p:nvSpPr>
-          <p:cNvPr id="17" name="Text 15"/>
-          <p:cNvSpPr txBox="1"/>
-          <p:nvPr/>
-        </p:nvSpPr>
-        <p:spPr>
-          <a:xfrm>
-            <a:off x="1508760" y="4370832"/>
+          <p:cNvPr id="18" name="Text 16"/>
+          <p:cNvSpPr txBox="1"/>
+          <p:nvPr/>
+        </p:nvSpPr>
+        <p:spPr>
+          <a:xfrm>
+            <a:off x="1508760" y="4700016"/>
             <a:ext cx="4206240" cy="548640"/>
           </a:xfrm>
           <a:prstGeom prst="rect">
@@ -7639,13 +7834,13 @@
       </p:sp>
       <p:sp>
         <p:nvSpPr>
-          <p:cNvPr id="18" name="Text 16"/>
-          <p:cNvSpPr txBox="1"/>
-          <p:nvPr/>
-        </p:nvSpPr>
-        <p:spPr>
-          <a:xfrm>
-            <a:off x="822960" y="5029200"/>
+          <p:cNvPr id="19" name="Text 17"/>
+          <p:cNvSpPr txBox="1"/>
+          <p:nvPr/>
+        </p:nvSpPr>
+        <p:spPr>
+          <a:xfrm>
+            <a:off x="822960" y="5358384"/>
             <a:ext cx="4846320" cy="822960"/>
           </a:xfrm>
           <a:prstGeom prst="rect">
@@ -7678,13 +7873,13 @@
       </p:sp>
       <p:sp>
         <p:nvSpPr>
-          <p:cNvPr id="19" name="Shape 17"/>
+          <p:cNvPr id="20" name="Shape 18"/>
           <p:cNvSpPr/>
           <p:nvPr/>
         </p:nvSpPr>
         <p:spPr>
           <a:xfrm>
-            <a:off x="6245352" y="4114800"/>
+            <a:off x="6245352" y="4443984"/>
             <a:ext cx="5394960" cy="1810512"/>
           </a:xfrm>
           <a:prstGeom prst="roundRect">
@@ -7705,13 +7900,13 @@
       </p:sp>
       <p:sp>
         <p:nvSpPr>
-          <p:cNvPr id="20" name="Shape 18"/>
+          <p:cNvPr id="21" name="Shape 19"/>
           <p:cNvSpPr/>
           <p:nvPr/>
         </p:nvSpPr>
         <p:spPr>
           <a:xfrm>
-            <a:off x="6519672" y="4407408"/>
+            <a:off x="6519672" y="4736592"/>
             <a:ext cx="548640" cy="548640"/>
           </a:xfrm>
           <a:prstGeom prst="ellipse">
@@ -7725,13 +7920,13 @@
       </p:sp>
       <p:sp>
         <p:nvSpPr>
-          <p:cNvPr id="21" name="Text 19"/>
-          <p:cNvSpPr txBox="1"/>
-          <p:nvPr/>
-        </p:nvSpPr>
-        <p:spPr>
-          <a:xfrm>
-            <a:off x="6519672" y="4407408"/>
+          <p:cNvPr id="22" name="Text 20"/>
+          <p:cNvSpPr txBox="1"/>
+          <p:nvPr/>
+        </p:nvSpPr>
+        <p:spPr>
+          <a:xfrm>
+            <a:off x="6519672" y="4736592"/>
             <a:ext cx="548640" cy="548640"/>
           </a:xfrm>
           <a:prstGeom prst="rect">
@@ -7764,13 +7959,13 @@
       </p:sp>
       <p:sp>
         <p:nvSpPr>
-          <p:cNvPr id="22" name="Text 20"/>
-          <p:cNvSpPr txBox="1"/>
-          <p:nvPr/>
-        </p:nvSpPr>
-        <p:spPr>
-          <a:xfrm>
-            <a:off x="7205472" y="4370832"/>
+          <p:cNvPr id="23" name="Text 21"/>
+          <p:cNvSpPr txBox="1"/>
+          <p:nvPr/>
+        </p:nvSpPr>
+        <p:spPr>
+          <a:xfrm>
+            <a:off x="7205472" y="4700016"/>
             <a:ext cx="4206240" cy="548640"/>
           </a:xfrm>
           <a:prstGeom prst="rect">
@@ -7803,13 +7998,13 @@
       </p:sp>
       <p:sp>
         <p:nvSpPr>
-          <p:cNvPr id="23" name="Text 21"/>
-          <p:cNvSpPr txBox="1"/>
-          <p:nvPr/>
-        </p:nvSpPr>
-        <p:spPr>
-          <a:xfrm>
-            <a:off x="6519672" y="5029200"/>
+          <p:cNvPr id="24" name="Text 22"/>
+          <p:cNvSpPr txBox="1"/>
+          <p:nvPr/>
+        </p:nvSpPr>
+        <p:spPr>
+          <a:xfrm>
+            <a:off x="6519672" y="5358384"/>
             <a:ext cx="4846320" cy="822960"/>
           </a:xfrm>
           <a:prstGeom prst="rect">
@@ -7842,7 +8037,7 @@
       </p:sp>
       <p:sp>
         <p:nvSpPr>
-          <p:cNvPr id="24" name="Shape 22"/>
+          <p:cNvPr id="25" name="Shape 23"/>
           <p:cNvSpPr/>
           <p:nvPr/>
         </p:nvSpPr>
@@ -7864,7 +8059,7 @@
       </p:sp>
       <p:sp>
         <p:nvSpPr>
-          <p:cNvPr id="25" name="Text 23"/>
+          <p:cNvPr id="26" name="Text 24"/>
           <p:cNvSpPr txBox="1"/>
           <p:nvPr/>
         </p:nvSpPr>
@@ -7903,7 +8098,7 @@
       </p:sp>
       <p:sp>
         <p:nvSpPr>
-          <p:cNvPr id="26" name="Text 24"/>
+          <p:cNvPr id="27" name="Text 25"/>
           <p:cNvSpPr txBox="1"/>
           <p:nvPr/>
         </p:nvSpPr>
@@ -7942,7 +8137,7 @@
       </p:sp>
       <p:sp>
         <p:nvSpPr>
-          <p:cNvPr id="27" name="Text 25"/>
+          <p:cNvPr id="28" name="Text 26"/>
           <p:cNvSpPr txBox="1"/>
           <p:nvPr/>
         </p:nvSpPr>
@@ -7993,7 +8188,7 @@
     <p:bg>
       <p:bgPr>
         <a:solidFill>
-          <a:srgbClr val="281C16"/>
+          <a:srgbClr val="301A12"/>
         </a:solidFill>
       </p:bgPr>
     </p:bg>
@@ -8019,12 +8214,12 @@
         </p:nvSpPr>
         <p:spPr>
           <a:xfrm>
-            <a:off x="10588752" y="502920"/>
-            <a:ext cx="1051560" cy="384048"/>
+            <a:off x="10405872" y="457200"/>
+            <a:ext cx="1234440" cy="457200"/>
           </a:xfrm>
           <a:prstGeom prst="roundRect">
             <a:avLst>
-              <a:gd name="adj" fmla="val 47619"/>
+              <a:gd name="adj" fmla="val 20000"/>
             </a:avLst>
           </a:prstGeom>
           <a:solidFill>
@@ -8041,8 +8236,8 @@
         </p:nvSpPr>
         <p:spPr>
           <a:xfrm>
-            <a:off x="10588752" y="502920"/>
-            <a:ext cx="1051560" cy="384048"/>
+            <a:off x="10405872" y="457200"/>
+            <a:ext cx="1234440" cy="457200"/>
           </a:xfrm>
           <a:prstGeom prst="rect">
             <a:avLst/>
@@ -8058,17 +8253,17 @@
               <a:buNone/>
             </a:pPr>
             <a:r>
-              <a:rPr lang="en-US" sz="1300" b="1" spc="200" kern="0" dirty="0">
-                <a:solidFill>
-                  <a:srgbClr val="281C16"/>
+              <a:rPr lang="en-US" sz="1400" b="1" spc="200" kern="0" dirty="0">
+                <a:solidFill>
+                  <a:srgbClr val="301A12"/>
                 </a:solidFill>
                 <a:latin typeface="Courier New" pitchFamily="34" charset="0"/>
                 <a:ea typeface="Courier New" pitchFamily="34" charset="-122"/>
                 <a:cs typeface="Courier New" pitchFamily="34" charset="-120"/>
               </a:rPr>
-              <a:t>GIT</a:t>
-            </a:r>
-            <a:endParaRPr lang="en-US" sz="1300" dirty="0"/>
+              <a:t>● GIT</a:t>
+            </a:r>
+            <a:endParaRPr lang="en-US" sz="1400" dirty="0"/>
           </a:p>
         </p:txBody>
       </p:sp>
@@ -8138,7 +8333,7 @@
             <a:r>
               <a:rPr lang="en-US" sz="3400" b="1" dirty="0">
                 <a:solidFill>
-                  <a:srgbClr val="C0CAF5"/>
+                  <a:srgbClr val="F6E6DB"/>
                 </a:solidFill>
                 <a:latin typeface="Calibri" pitchFamily="34" charset="0"/>
                 <a:ea typeface="Calibri" pitchFamily="34" charset="-122"/>
@@ -8181,7 +8376,7 @@
             <a:r>
               <a:rPr lang="en-US" sz="1600" dirty="0">
                 <a:solidFill>
-                  <a:srgbClr val="A9B1D6"/>
+                  <a:srgbClr val="E0C6B6"/>
                 </a:solidFill>
                 <a:latin typeface="Calibri" pitchFamily="34" charset="0"/>
                 <a:ea typeface="Calibri" pitchFamily="34" charset="-122"/>
@@ -8202,7 +8397,7 @@
             <a:r>
               <a:rPr lang="en-US" sz="1600" dirty="0">
                 <a:solidFill>
-                  <a:srgbClr val="A9B1D6"/>
+                  <a:srgbClr val="E0C6B6"/>
                 </a:solidFill>
                 <a:latin typeface="Calibri" pitchFamily="34" charset="0"/>
                 <a:ea typeface="Calibri" pitchFamily="34" charset="-122"/>
@@ -8223,7 +8418,7 @@
             <a:r>
               <a:rPr lang="en-US" sz="1600" dirty="0">
                 <a:solidFill>
-                  <a:srgbClr val="A9B1D6"/>
+                  <a:srgbClr val="E0C6B6"/>
                 </a:solidFill>
                 <a:latin typeface="Calibri" pitchFamily="34" charset="0"/>
                 <a:ea typeface="Calibri" pitchFamily="34" charset="-122"/>
@@ -8244,7 +8439,7 @@
             <a:r>
               <a:rPr lang="en-US" sz="1600" dirty="0">
                 <a:solidFill>
-                  <a:srgbClr val="A9B1D6"/>
+                  <a:srgbClr val="E0C6B6"/>
                 </a:solidFill>
                 <a:latin typeface="Calibri" pitchFamily="34" charset="0"/>
                 <a:ea typeface="Calibri" pitchFamily="34" charset="-122"/>
@@ -8273,7 +8468,7 @@
             </a:avLst>
           </a:prstGeom>
           <a:solidFill>
-            <a:srgbClr val="24283B"/>
+            <a:srgbClr val="3E2418"/>
           </a:solidFill>
           <a:ln w="15875">
             <a:solidFill>
@@ -8351,7 +8546,7 @@
         <p:spPr>
           <a:xfrm>
             <a:off x="7269480" y="3108960"/>
-            <a:ext cx="4160520" cy="2286000"/>
+            <a:ext cx="4160520" cy="2194560"/>
           </a:xfrm>
           <a:prstGeom prst="rect">
             <a:avLst/>
@@ -8369,7 +8564,7 @@
             <a:r>
               <a:rPr lang="en-US" sz="1600" dirty="0">
                 <a:solidFill>
-                  <a:srgbClr val="C0CAF5"/>
+                  <a:srgbClr val="F6E6DB"/>
                 </a:solidFill>
                 <a:latin typeface="Calibri" pitchFamily="34" charset="0"/>
                 <a:ea typeface="Calibri" pitchFamily="34" charset="-122"/>
@@ -8534,7 +8729,7 @@
     <p:bg>
       <p:bgPr>
         <a:solidFill>
-          <a:srgbClr val="281C16"/>
+          <a:srgbClr val="301A12"/>
         </a:solidFill>
       </p:bgPr>
     </p:bg>
@@ -8560,12 +8755,12 @@
         </p:nvSpPr>
         <p:spPr>
           <a:xfrm>
-            <a:off x="10588752" y="502920"/>
-            <a:ext cx="1051560" cy="384048"/>
+            <a:off x="10405872" y="457200"/>
+            <a:ext cx="1234440" cy="457200"/>
           </a:xfrm>
           <a:prstGeom prst="roundRect">
             <a:avLst>
-              <a:gd name="adj" fmla="val 47619"/>
+              <a:gd name="adj" fmla="val 20000"/>
             </a:avLst>
           </a:prstGeom>
           <a:solidFill>
@@ -8582,8 +8777,8 @@
         </p:nvSpPr>
         <p:spPr>
           <a:xfrm>
-            <a:off x="10588752" y="502920"/>
-            <a:ext cx="1051560" cy="384048"/>
+            <a:off x="10405872" y="457200"/>
+            <a:ext cx="1234440" cy="457200"/>
           </a:xfrm>
           <a:prstGeom prst="rect">
             <a:avLst/>
@@ -8599,17 +8794,17 @@
               <a:buNone/>
             </a:pPr>
             <a:r>
-              <a:rPr lang="en-US" sz="1300" b="1" spc="200" kern="0" dirty="0">
-                <a:solidFill>
-                  <a:srgbClr val="281C16"/>
+              <a:rPr lang="en-US" sz="1400" b="1" spc="200" kern="0" dirty="0">
+                <a:solidFill>
+                  <a:srgbClr val="301A12"/>
                 </a:solidFill>
                 <a:latin typeface="Courier New" pitchFamily="34" charset="0"/>
                 <a:ea typeface="Courier New" pitchFamily="34" charset="-122"/>
                 <a:cs typeface="Courier New" pitchFamily="34" charset="-120"/>
               </a:rPr>
-              <a:t>GIT</a:t>
-            </a:r>
-            <a:endParaRPr lang="en-US" sz="1300" dirty="0"/>
+              <a:t>● GIT</a:t>
+            </a:r>
+            <a:endParaRPr lang="en-US" sz="1400" dirty="0"/>
           </a:p>
         </p:txBody>
       </p:sp>
@@ -8679,7 +8874,7 @@
             <a:r>
               <a:rPr lang="en-US" sz="3400" b="1" dirty="0">
                 <a:solidFill>
-                  <a:srgbClr val="C0CAF5"/>
+                  <a:srgbClr val="F6E6DB"/>
                 </a:solidFill>
                 <a:latin typeface="Calibri" pitchFamily="34" charset="0"/>
                 <a:ea typeface="Calibri" pitchFamily="34" charset="-122"/>
@@ -8738,7 +8933,7 @@
             <a:r>
               <a:rPr lang="en-US" sz="1800" b="1" dirty="0">
                 <a:solidFill>
-                  <a:srgbClr val="1A1B26"/>
+                  <a:srgbClr val="301A12"/>
                 </a:solidFill>
                 <a:latin typeface="Courier New" pitchFamily="34" charset="0"/>
                 <a:ea typeface="Courier New" pitchFamily="34" charset="-122"/>
@@ -8777,7 +8972,7 @@
             <a:r>
               <a:rPr lang="en-US" sz="1700" b="1" dirty="0">
                 <a:solidFill>
-                  <a:srgbClr val="C0CAF5"/>
+                  <a:srgbClr val="F6E6DB"/>
                 </a:solidFill>
                 <a:latin typeface="Calibri" pitchFamily="34" charset="0"/>
                 <a:ea typeface="Calibri" pitchFamily="34" charset="-122"/>
@@ -8816,7 +9011,7 @@
             <a:r>
               <a:rPr lang="en-US" sz="1350" dirty="0">
                 <a:solidFill>
-                  <a:srgbClr val="A9B1D6"/>
+                  <a:srgbClr val="E0C6B6"/>
                 </a:solidFill>
                 <a:latin typeface="Calibri" pitchFamily="34" charset="0"/>
                 <a:ea typeface="Calibri" pitchFamily="34" charset="-122"/>
@@ -8875,7 +9070,7 @@
             <a:r>
               <a:rPr lang="en-US" sz="1800" b="1" dirty="0">
                 <a:solidFill>
-                  <a:srgbClr val="1A1B26"/>
+                  <a:srgbClr val="301A12"/>
                 </a:solidFill>
                 <a:latin typeface="Courier New" pitchFamily="34" charset="0"/>
                 <a:ea typeface="Courier New" pitchFamily="34" charset="-122"/>
@@ -8914,7 +9109,7 @@
             <a:r>
               <a:rPr lang="en-US" sz="1700" b="1" dirty="0">
                 <a:solidFill>
-                  <a:srgbClr val="C0CAF5"/>
+                  <a:srgbClr val="F6E6DB"/>
                 </a:solidFill>
                 <a:latin typeface="Calibri" pitchFamily="34" charset="0"/>
                 <a:ea typeface="Calibri" pitchFamily="34" charset="-122"/>
@@ -8953,7 +9148,7 @@
             <a:r>
               <a:rPr lang="en-US" sz="1350" dirty="0">
                 <a:solidFill>
-                  <a:srgbClr val="A9B1D6"/>
+                  <a:srgbClr val="E0C6B6"/>
                 </a:solidFill>
                 <a:latin typeface="Calibri" pitchFamily="34" charset="0"/>
                 <a:ea typeface="Calibri" pitchFamily="34" charset="-122"/>
@@ -9012,7 +9207,7 @@
             <a:r>
               <a:rPr lang="en-US" sz="1800" b="1" dirty="0">
                 <a:solidFill>
-                  <a:srgbClr val="1A1B26"/>
+                  <a:srgbClr val="301A12"/>
                 </a:solidFill>
                 <a:latin typeface="Courier New" pitchFamily="34" charset="0"/>
                 <a:ea typeface="Courier New" pitchFamily="34" charset="-122"/>
@@ -9051,7 +9246,7 @@
             <a:r>
               <a:rPr lang="en-US" sz="1700" b="1" dirty="0">
                 <a:solidFill>
-                  <a:srgbClr val="C0CAF5"/>
+                  <a:srgbClr val="F6E6DB"/>
                 </a:solidFill>
                 <a:latin typeface="Calibri" pitchFamily="34" charset="0"/>
                 <a:ea typeface="Calibri" pitchFamily="34" charset="-122"/>
@@ -9090,7 +9285,7 @@
             <a:r>
               <a:rPr lang="en-US" sz="1350" dirty="0">
                 <a:solidFill>
-                  <a:srgbClr val="A9B1D6"/>
+                  <a:srgbClr val="E0C6B6"/>
                 </a:solidFill>
                 <a:latin typeface="Calibri" pitchFamily="34" charset="0"/>
                 <a:ea typeface="Calibri" pitchFamily="34" charset="-122"/>
@@ -9149,7 +9344,7 @@
             <a:r>
               <a:rPr lang="en-US" sz="1800" b="1" dirty="0">
                 <a:solidFill>
-                  <a:srgbClr val="1A1B26"/>
+                  <a:srgbClr val="301A12"/>
                 </a:solidFill>
                 <a:latin typeface="Courier New" pitchFamily="34" charset="0"/>
                 <a:ea typeface="Courier New" pitchFamily="34" charset="-122"/>
@@ -9188,7 +9383,7 @@
             <a:r>
               <a:rPr lang="en-US" sz="1700" b="1" dirty="0">
                 <a:solidFill>
-                  <a:srgbClr val="C0CAF5"/>
+                  <a:srgbClr val="F6E6DB"/>
                 </a:solidFill>
                 <a:latin typeface="Calibri" pitchFamily="34" charset="0"/>
                 <a:ea typeface="Calibri" pitchFamily="34" charset="-122"/>
@@ -9227,7 +9422,7 @@
             <a:r>
               <a:rPr lang="en-US" sz="1350" dirty="0">
                 <a:solidFill>
-                  <a:srgbClr val="A9B1D6"/>
+                  <a:srgbClr val="E0C6B6"/>
                 </a:solidFill>
                 <a:latin typeface="Calibri" pitchFamily="34" charset="0"/>
                 <a:ea typeface="Calibri" pitchFamily="34" charset="-122"/>
@@ -9392,7 +9587,7 @@
     <p:bg>
       <p:bgPr>
         <a:solidFill>
-          <a:srgbClr val="281C16"/>
+          <a:srgbClr val="301A12"/>
         </a:solidFill>
       </p:bgPr>
     </p:bg>
@@ -9418,12 +9613,12 @@
         </p:nvSpPr>
         <p:spPr>
           <a:xfrm>
-            <a:off x="10588752" y="502920"/>
-            <a:ext cx="1051560" cy="384048"/>
+            <a:off x="10405872" y="457200"/>
+            <a:ext cx="1234440" cy="457200"/>
           </a:xfrm>
           <a:prstGeom prst="roundRect">
             <a:avLst>
-              <a:gd name="adj" fmla="val 47619"/>
+              <a:gd name="adj" fmla="val 20000"/>
             </a:avLst>
           </a:prstGeom>
           <a:solidFill>
@@ -9440,8 +9635,8 @@
         </p:nvSpPr>
         <p:spPr>
           <a:xfrm>
-            <a:off x="10588752" y="502920"/>
-            <a:ext cx="1051560" cy="384048"/>
+            <a:off x="10405872" y="457200"/>
+            <a:ext cx="1234440" cy="457200"/>
           </a:xfrm>
           <a:prstGeom prst="rect">
             <a:avLst/>
@@ -9457,17 +9652,17 @@
               <a:buNone/>
             </a:pPr>
             <a:r>
-              <a:rPr lang="en-US" sz="1300" b="1" spc="200" kern="0" dirty="0">
-                <a:solidFill>
-                  <a:srgbClr val="281C16"/>
+              <a:rPr lang="en-US" sz="1400" b="1" spc="200" kern="0" dirty="0">
+                <a:solidFill>
+                  <a:srgbClr val="301A12"/>
                 </a:solidFill>
                 <a:latin typeface="Courier New" pitchFamily="34" charset="0"/>
                 <a:ea typeface="Courier New" pitchFamily="34" charset="-122"/>
                 <a:cs typeface="Courier New" pitchFamily="34" charset="-120"/>
               </a:rPr>
-              <a:t>GIT</a:t>
-            </a:r>
-            <a:endParaRPr lang="en-US" sz="1300" dirty="0"/>
+              <a:t>● GIT</a:t>
+            </a:r>
+            <a:endParaRPr lang="en-US" sz="1400" dirty="0"/>
           </a:p>
         </p:txBody>
       </p:sp>
@@ -9537,7 +9732,7 @@
             <a:r>
               <a:rPr lang="en-US" sz="3400" b="1" dirty="0">
                 <a:solidFill>
-                  <a:srgbClr val="C0CAF5"/>
+                  <a:srgbClr val="F6E6DB"/>
                 </a:solidFill>
                 <a:latin typeface="Calibri" pitchFamily="34" charset="0"/>
                 <a:ea typeface="Calibri" pitchFamily="34" charset="-122"/>
@@ -9580,7 +9775,7 @@
             <a:r>
               <a:rPr lang="en-US" sz="1500" dirty="0">
                 <a:solidFill>
-                  <a:srgbClr val="A9B1D6"/>
+                  <a:srgbClr val="E0C6B6"/>
                 </a:solidFill>
                 <a:latin typeface="Calibri" pitchFamily="34" charset="0"/>
                 <a:ea typeface="Calibri" pitchFamily="34" charset="-122"/>
@@ -9601,7 +9796,7 @@
             <a:r>
               <a:rPr lang="en-US" sz="1500" dirty="0">
                 <a:solidFill>
-                  <a:srgbClr val="A9B1D6"/>
+                  <a:srgbClr val="E0C6B6"/>
                 </a:solidFill>
                 <a:latin typeface="Calibri" pitchFamily="34" charset="0"/>
                 <a:ea typeface="Calibri" pitchFamily="34" charset="-122"/>
@@ -9622,7 +9817,7 @@
             <a:r>
               <a:rPr lang="en-US" sz="1500" dirty="0">
                 <a:solidFill>
-                  <a:srgbClr val="A9B1D6"/>
+                  <a:srgbClr val="E0C6B6"/>
                 </a:solidFill>
                 <a:latin typeface="Calibri" pitchFamily="34" charset="0"/>
                 <a:ea typeface="Calibri" pitchFamily="34" charset="-122"/>
@@ -9643,7 +9838,7 @@
             <a:r>
               <a:rPr lang="en-US" sz="1500" dirty="0">
                 <a:solidFill>
-                  <a:srgbClr val="A9B1D6"/>
+                  <a:srgbClr val="E0C6B6"/>
                 </a:solidFill>
                 <a:latin typeface="Calibri" pitchFamily="34" charset="0"/>
                 <a:ea typeface="Calibri" pitchFamily="34" charset="-122"/>
@@ -9672,11 +9867,11 @@
             </a:avLst>
           </a:prstGeom>
           <a:solidFill>
-            <a:srgbClr val="16161E"/>
+            <a:srgbClr val="22120B"/>
           </a:solidFill>
           <a:ln w="12700">
             <a:solidFill>
-              <a:srgbClr val="2A2E42"/>
+              <a:srgbClr val="5C3421"/>
             </a:solidFill>
             <a:prstDash val="solid"/>
           </a:ln>
@@ -10197,8 +10392,47 @@
         </p:nvSpPr>
         <p:spPr>
           <a:xfrm>
-            <a:off x="548640" y="2011680"/>
-            <a:ext cx="6126480" cy="3840480"/>
+            <a:off x="548640" y="1627632"/>
+            <a:ext cx="10881360" cy="502920"/>
+          </a:xfrm>
+          <a:prstGeom prst="rect">
+            <a:avLst/>
+          </a:prstGeom>
+          <a:noFill/>
+          <a:ln/>
+        </p:spPr>
+        <p:txBody>
+          <a:bodyPr wrap="square" lIns="0" tIns="0" rIns="0" bIns="0" rtlCol="0" anchor="t"/>
+          <a:lstStyle/>
+          <a:p>
+            <a:pPr algn="l" indent="0" marL="0">
+              <a:buNone/>
+            </a:pPr>
+            <a:r>
+              <a:rPr lang="en-US" sz="1500" dirty="0">
+                <a:solidFill>
+                  <a:srgbClr val="A9B1D6"/>
+                </a:solidFill>
+                <a:latin typeface="Calibri" pitchFamily="34" charset="0"/>
+                <a:ea typeface="Calibri" pitchFamily="34" charset="-122"/>
+                <a:cs typeface="Calibri" pitchFamily="34" charset="-120"/>
+              </a:rPr>
+              <a:t>Before any technique makes sense, let's be honest about the surprisingly simple thing the model is doing when it 'writes'.</a:t>
+            </a:r>
+            <a:endParaRPr lang="en-US" sz="1500" dirty="0"/>
+          </a:p>
+        </p:txBody>
+      </p:sp>
+      <p:sp>
+        <p:nvSpPr>
+          <p:cNvPr id="5" name="Text 3"/>
+          <p:cNvSpPr txBox="1"/>
+          <p:nvPr/>
+        </p:nvSpPr>
+        <p:spPr>
+          <a:xfrm>
+            <a:off x="548640" y="2340864"/>
+            <a:ext cx="6126480" cy="3511296"/>
           </a:xfrm>
           <a:prstGeom prst="rect">
             <a:avLst/>
@@ -10336,18 +10570,18 @@
       </p:sp>
       <p:sp>
         <p:nvSpPr>
-          <p:cNvPr id="5" name="Shape 3"/>
+          <p:cNvPr id="6" name="Shape 4"/>
           <p:cNvSpPr/>
           <p:nvPr/>
         </p:nvSpPr>
         <p:spPr>
           <a:xfrm>
-            <a:off x="6995160" y="2148840"/>
-            <a:ext cx="4645152" cy="3383280"/>
+            <a:off x="6995160" y="2478024"/>
+            <a:ext cx="4645152" cy="3054096"/>
           </a:xfrm>
           <a:prstGeom prst="roundRect">
             <a:avLst>
-              <a:gd name="adj" fmla="val 2432"/>
+              <a:gd name="adj" fmla="val 2695"/>
             </a:avLst>
           </a:prstGeom>
           <a:solidFill>
@@ -10363,13 +10597,13 @@
       </p:sp>
       <p:sp>
         <p:nvSpPr>
-          <p:cNvPr id="6" name="Shape 4"/>
+          <p:cNvPr id="7" name="Shape 5"/>
           <p:cNvSpPr/>
           <p:nvPr/>
         </p:nvSpPr>
         <p:spPr>
           <a:xfrm>
-            <a:off x="7269480" y="2423160"/>
+            <a:off x="7269480" y="2752344"/>
             <a:ext cx="457200" cy="457200"/>
           </a:xfrm>
           <a:prstGeom prst="ellipse">
@@ -10383,13 +10617,13 @@
       </p:sp>
       <p:sp>
         <p:nvSpPr>
-          <p:cNvPr id="7" name="Text 5"/>
-          <p:cNvSpPr txBox="1"/>
-          <p:nvPr/>
-        </p:nvSpPr>
-        <p:spPr>
-          <a:xfrm>
-            <a:off x="7818120" y="2450592"/>
+          <p:cNvPr id="8" name="Text 6"/>
+          <p:cNvSpPr txBox="1"/>
+          <p:nvPr/>
+        </p:nvSpPr>
+        <p:spPr>
+          <a:xfrm>
+            <a:off x="7818120" y="2779776"/>
             <a:ext cx="3657600" cy="411480"/>
           </a:xfrm>
           <a:prstGeom prst="rect">
@@ -10422,14 +10656,14 @@
       </p:sp>
       <p:sp>
         <p:nvSpPr>
-          <p:cNvPr id="8" name="Text 6"/>
-          <p:cNvSpPr txBox="1"/>
-          <p:nvPr/>
-        </p:nvSpPr>
-        <p:spPr>
-          <a:xfrm>
-            <a:off x="7269480" y="3108960"/>
-            <a:ext cx="4160520" cy="2286000"/>
+          <p:cNvPr id="9" name="Text 7"/>
+          <p:cNvSpPr txBox="1"/>
+          <p:nvPr/>
+        </p:nvSpPr>
+        <p:spPr>
+          <a:xfrm>
+            <a:off x="7269480" y="3438144"/>
+            <a:ext cx="4160520" cy="1865376"/>
           </a:xfrm>
           <a:prstGeom prst="rect">
             <a:avLst/>
@@ -10461,7 +10695,7 @@
       </p:sp>
       <p:sp>
         <p:nvSpPr>
-          <p:cNvPr id="9" name="Shape 7"/>
+          <p:cNvPr id="10" name="Shape 8"/>
           <p:cNvSpPr/>
           <p:nvPr/>
         </p:nvSpPr>
@@ -10483,7 +10717,7 @@
       </p:sp>
       <p:sp>
         <p:nvSpPr>
-          <p:cNvPr id="10" name="Text 8"/>
+          <p:cNvPr id="11" name="Text 9"/>
           <p:cNvSpPr txBox="1"/>
           <p:nvPr/>
         </p:nvSpPr>
@@ -10522,7 +10756,7 @@
       </p:sp>
       <p:sp>
         <p:nvSpPr>
-          <p:cNvPr id="11" name="Text 9"/>
+          <p:cNvPr id="12" name="Text 10"/>
           <p:cNvSpPr txBox="1"/>
           <p:nvPr/>
         </p:nvSpPr>
@@ -10561,7 +10795,7 @@
       </p:sp>
       <p:sp>
         <p:nvSpPr>
-          <p:cNvPr id="12" name="Text 10"/>
+          <p:cNvPr id="13" name="Text 11"/>
           <p:cNvSpPr txBox="1"/>
           <p:nvPr/>
         </p:nvSpPr>
@@ -10716,8 +10950,47 @@
         </p:nvSpPr>
         <p:spPr>
           <a:xfrm>
-            <a:off x="548640" y="2057400"/>
-            <a:ext cx="4709160" cy="3749040"/>
+            <a:off x="548640" y="1627632"/>
+            <a:ext cx="10881360" cy="502920"/>
+          </a:xfrm>
+          <a:prstGeom prst="rect">
+            <a:avLst/>
+          </a:prstGeom>
+          <a:noFill/>
+          <a:ln/>
+        </p:spPr>
+        <p:txBody>
+          <a:bodyPr wrap="square" lIns="0" tIns="0" rIns="0" bIns="0" rtlCol="0" anchor="t"/>
+          <a:lstStyle/>
+          <a:p>
+            <a:pPr algn="l" indent="0" marL="0">
+              <a:buNone/>
+            </a:pPr>
+            <a:r>
+              <a:rPr lang="en-US" sz="1500" dirty="0">
+                <a:solidFill>
+                  <a:srgbClr val="A9B1D6"/>
+                </a:solidFill>
+                <a:latin typeface="Calibri" pitchFamily="34" charset="0"/>
+                <a:ea typeface="Calibri" pitchFamily="34" charset="-122"/>
+                <a:cs typeface="Calibri" pitchFamily="34" charset="-120"/>
+              </a:rPr>
+              <a:t>The model doesn't read words the way you do — it reads tokens, and that one fact explains a lot of odd behaviour.</a:t>
+            </a:r>
+            <a:endParaRPr lang="en-US" sz="1500" dirty="0"/>
+          </a:p>
+        </p:txBody>
+      </p:sp>
+      <p:sp>
+        <p:nvSpPr>
+          <p:cNvPr id="5" name="Text 3"/>
+          <p:cNvSpPr txBox="1"/>
+          <p:nvPr/>
+        </p:nvSpPr>
+        <p:spPr>
+          <a:xfrm>
+            <a:off x="548640" y="2386584"/>
+            <a:ext cx="4709160" cy="3419856"/>
           </a:xfrm>
           <a:prstGeom prst="rect">
             <a:avLst/>
@@ -10855,18 +11128,18 @@
       </p:sp>
       <p:sp>
         <p:nvSpPr>
-          <p:cNvPr id="5" name="Shape 3"/>
+          <p:cNvPr id="6" name="Shape 4"/>
           <p:cNvSpPr/>
           <p:nvPr/>
         </p:nvSpPr>
         <p:spPr>
           <a:xfrm>
-            <a:off x="5532120" y="2057400"/>
-            <a:ext cx="6108192" cy="3794760"/>
+            <a:off x="5532120" y="2386584"/>
+            <a:ext cx="6108192" cy="3465576"/>
           </a:xfrm>
           <a:prstGeom prst="roundRect">
             <a:avLst>
-              <a:gd name="adj" fmla="val 1446"/>
+              <a:gd name="adj" fmla="val 1583"/>
             </a:avLst>
           </a:prstGeom>
           <a:solidFill>
@@ -10882,13 +11155,13 @@
       </p:sp>
       <p:sp>
         <p:nvSpPr>
-          <p:cNvPr id="6" name="Text 4"/>
-          <p:cNvSpPr txBox="1"/>
-          <p:nvPr/>
-        </p:nvSpPr>
-        <p:spPr>
-          <a:xfrm>
-            <a:off x="5760720" y="2194560"/>
+          <p:cNvPr id="7" name="Text 5"/>
+          <p:cNvSpPr txBox="1"/>
+          <p:nvPr/>
+        </p:nvSpPr>
+        <p:spPr>
+          <a:xfrm>
+            <a:off x="5760720" y="2523744"/>
             <a:ext cx="5650992" cy="320040"/>
           </a:xfrm>
           <a:prstGeom prst="rect">
@@ -10921,14 +11194,14 @@
       </p:sp>
       <p:sp>
         <p:nvSpPr>
-          <p:cNvPr id="7" name="Text 5"/>
-          <p:cNvSpPr txBox="1"/>
-          <p:nvPr/>
-        </p:nvSpPr>
-        <p:spPr>
-          <a:xfrm>
-            <a:off x="5788152" y="2560320"/>
-            <a:ext cx="5596128" cy="3108960"/>
+          <p:cNvPr id="8" name="Text 6"/>
+          <p:cNvSpPr txBox="1"/>
+          <p:nvPr/>
+        </p:nvSpPr>
+        <p:spPr>
+          <a:xfrm>
+            <a:off x="5788152" y="2889504"/>
+            <a:ext cx="5596128" cy="2779776"/>
           </a:xfrm>
           <a:prstGeom prst="rect">
             <a:avLst/>
@@ -11083,7 +11356,7 @@
       </p:sp>
       <p:sp>
         <p:nvSpPr>
-          <p:cNvPr id="8" name="Shape 6"/>
+          <p:cNvPr id="9" name="Shape 7"/>
           <p:cNvSpPr/>
           <p:nvPr/>
         </p:nvSpPr>
@@ -11105,7 +11378,7 @@
       </p:sp>
       <p:sp>
         <p:nvSpPr>
-          <p:cNvPr id="9" name="Text 7"/>
+          <p:cNvPr id="10" name="Text 8"/>
           <p:cNvSpPr txBox="1"/>
           <p:nvPr/>
         </p:nvSpPr>
@@ -11144,7 +11417,7 @@
       </p:sp>
       <p:sp>
         <p:nvSpPr>
-          <p:cNvPr id="10" name="Text 8"/>
+          <p:cNvPr id="11" name="Text 9"/>
           <p:cNvSpPr txBox="1"/>
           <p:nvPr/>
         </p:nvSpPr>
@@ -11183,7 +11456,7 @@
       </p:sp>
       <p:sp>
         <p:nvSpPr>
-          <p:cNvPr id="11" name="Text 9"/>
+          <p:cNvPr id="12" name="Text 10"/>
           <p:cNvSpPr txBox="1"/>
           <p:nvPr/>
         </p:nvSpPr>
@@ -11332,13 +11605,52 @@
       </p:sp>
       <p:sp>
         <p:nvSpPr>
-          <p:cNvPr id="4" name="Shape 2"/>
+          <p:cNvPr id="4" name="Text 2"/>
+          <p:cNvSpPr txBox="1"/>
+          <p:nvPr/>
+        </p:nvSpPr>
+        <p:spPr>
+          <a:xfrm>
+            <a:off x="548640" y="1627632"/>
+            <a:ext cx="10881360" cy="502920"/>
+          </a:xfrm>
+          <a:prstGeom prst="rect">
+            <a:avLst/>
+          </a:prstGeom>
+          <a:noFill/>
+          <a:ln/>
+        </p:spPr>
+        <p:txBody>
+          <a:bodyPr wrap="square" lIns="0" tIns="0" rIns="0" bIns="0" rtlCol="0" anchor="t"/>
+          <a:lstStyle/>
+          <a:p>
+            <a:pPr algn="l" indent="0" marL="0">
+              <a:buNone/>
+            </a:pPr>
+            <a:r>
+              <a:rPr lang="en-US" sz="1500" dirty="0">
+                <a:solidFill>
+                  <a:srgbClr val="A9B1D6"/>
+                </a:solidFill>
+                <a:latin typeface="Calibri" pitchFamily="34" charset="0"/>
+                <a:ea typeface="Calibri" pitchFamily="34" charset="-122"/>
+                <a:cs typeface="Calibri" pitchFamily="34" charset="-120"/>
+              </a:rPr>
+              <a:t>Beyond the prompt text you get a handful of dials — here's what each one really does.</a:t>
+            </a:r>
+            <a:endParaRPr lang="en-US" sz="1500" dirty="0"/>
+          </a:p>
+        </p:txBody>
+      </p:sp>
+      <p:sp>
+        <p:nvSpPr>
+          <p:cNvPr id="5" name="Shape 3"/>
           <p:cNvSpPr/>
           <p:nvPr/>
         </p:nvSpPr>
         <p:spPr>
           <a:xfrm>
-            <a:off x="548640" y="2103120"/>
+            <a:off x="548640" y="2432304"/>
             <a:ext cx="5394960" cy="1810512"/>
           </a:xfrm>
           <a:prstGeom prst="roundRect">
@@ -11359,13 +11671,13 @@
       </p:sp>
       <p:sp>
         <p:nvSpPr>
-          <p:cNvPr id="5" name="Shape 3"/>
+          <p:cNvPr id="6" name="Shape 4"/>
           <p:cNvSpPr/>
           <p:nvPr/>
         </p:nvSpPr>
         <p:spPr>
           <a:xfrm>
-            <a:off x="822960" y="2395728"/>
+            <a:off x="822960" y="2724912"/>
             <a:ext cx="548640" cy="548640"/>
           </a:xfrm>
           <a:prstGeom prst="ellipse">
@@ -11379,13 +11691,13 @@
       </p:sp>
       <p:sp>
         <p:nvSpPr>
-          <p:cNvPr id="6" name="Text 4"/>
-          <p:cNvSpPr txBox="1"/>
-          <p:nvPr/>
-        </p:nvSpPr>
-        <p:spPr>
-          <a:xfrm>
-            <a:off x="822960" y="2395728"/>
+          <p:cNvPr id="7" name="Text 5"/>
+          <p:cNvSpPr txBox="1"/>
+          <p:nvPr/>
+        </p:nvSpPr>
+        <p:spPr>
+          <a:xfrm>
+            <a:off x="822960" y="2724912"/>
             <a:ext cx="548640" cy="548640"/>
           </a:xfrm>
           <a:prstGeom prst="rect">
@@ -11418,13 +11730,13 @@
       </p:sp>
       <p:sp>
         <p:nvSpPr>
-          <p:cNvPr id="7" name="Text 5"/>
-          <p:cNvSpPr txBox="1"/>
-          <p:nvPr/>
-        </p:nvSpPr>
-        <p:spPr>
-          <a:xfrm>
-            <a:off x="1508760" y="2359152"/>
+          <p:cNvPr id="8" name="Text 6"/>
+          <p:cNvSpPr txBox="1"/>
+          <p:nvPr/>
+        </p:nvSpPr>
+        <p:spPr>
+          <a:xfrm>
+            <a:off x="1508760" y="2688336"/>
             <a:ext cx="4206240" cy="548640"/>
           </a:xfrm>
           <a:prstGeom prst="rect">
@@ -11457,13 +11769,13 @@
       </p:sp>
       <p:sp>
         <p:nvSpPr>
-          <p:cNvPr id="8" name="Text 6"/>
-          <p:cNvSpPr txBox="1"/>
-          <p:nvPr/>
-        </p:nvSpPr>
-        <p:spPr>
-          <a:xfrm>
-            <a:off x="822960" y="3017520"/>
+          <p:cNvPr id="9" name="Text 7"/>
+          <p:cNvSpPr txBox="1"/>
+          <p:nvPr/>
+        </p:nvSpPr>
+        <p:spPr>
+          <a:xfrm>
+            <a:off x="822960" y="3346704"/>
             <a:ext cx="4846320" cy="822960"/>
           </a:xfrm>
           <a:prstGeom prst="rect">
@@ -11496,13 +11808,13 @@
       </p:sp>
       <p:sp>
         <p:nvSpPr>
-          <p:cNvPr id="9" name="Shape 7"/>
+          <p:cNvPr id="10" name="Shape 8"/>
           <p:cNvSpPr/>
           <p:nvPr/>
         </p:nvSpPr>
         <p:spPr>
           <a:xfrm>
-            <a:off x="6245352" y="2103120"/>
+            <a:off x="6245352" y="2432304"/>
             <a:ext cx="5394960" cy="1810512"/>
           </a:xfrm>
           <a:prstGeom prst="roundRect">
@@ -11523,13 +11835,13 @@
       </p:sp>
       <p:sp>
         <p:nvSpPr>
-          <p:cNvPr id="10" name="Shape 8"/>
+          <p:cNvPr id="11" name="Shape 9"/>
           <p:cNvSpPr/>
           <p:nvPr/>
         </p:nvSpPr>
         <p:spPr>
           <a:xfrm>
-            <a:off x="6519672" y="2395728"/>
+            <a:off x="6519672" y="2724912"/>
             <a:ext cx="548640" cy="548640"/>
           </a:xfrm>
           <a:prstGeom prst="ellipse">
@@ -11543,13 +11855,13 @@
       </p:sp>
       <p:sp>
         <p:nvSpPr>
-          <p:cNvPr id="11" name="Text 9"/>
-          <p:cNvSpPr txBox="1"/>
-          <p:nvPr/>
-        </p:nvSpPr>
-        <p:spPr>
-          <a:xfrm>
-            <a:off x="6519672" y="2395728"/>
+          <p:cNvPr id="12" name="Text 10"/>
+          <p:cNvSpPr txBox="1"/>
+          <p:nvPr/>
+        </p:nvSpPr>
+        <p:spPr>
+          <a:xfrm>
+            <a:off x="6519672" y="2724912"/>
             <a:ext cx="548640" cy="548640"/>
           </a:xfrm>
           <a:prstGeom prst="rect">
@@ -11582,13 +11894,13 @@
       </p:sp>
       <p:sp>
         <p:nvSpPr>
-          <p:cNvPr id="12" name="Text 10"/>
-          <p:cNvSpPr txBox="1"/>
-          <p:nvPr/>
-        </p:nvSpPr>
-        <p:spPr>
-          <a:xfrm>
-            <a:off x="7205472" y="2359152"/>
+          <p:cNvPr id="13" name="Text 11"/>
+          <p:cNvSpPr txBox="1"/>
+          <p:nvPr/>
+        </p:nvSpPr>
+        <p:spPr>
+          <a:xfrm>
+            <a:off x="7205472" y="2688336"/>
             <a:ext cx="4206240" cy="548640"/>
           </a:xfrm>
           <a:prstGeom prst="rect">
@@ -11621,13 +11933,13 @@
       </p:sp>
       <p:sp>
         <p:nvSpPr>
-          <p:cNvPr id="13" name="Text 11"/>
-          <p:cNvSpPr txBox="1"/>
-          <p:nvPr/>
-        </p:nvSpPr>
-        <p:spPr>
-          <a:xfrm>
-            <a:off x="6519672" y="3017520"/>
+          <p:cNvPr id="14" name="Text 12"/>
+          <p:cNvSpPr txBox="1"/>
+          <p:nvPr/>
+        </p:nvSpPr>
+        <p:spPr>
+          <a:xfrm>
+            <a:off x="6519672" y="3346704"/>
             <a:ext cx="4846320" cy="822960"/>
           </a:xfrm>
           <a:prstGeom prst="rect">
@@ -11660,13 +11972,13 @@
       </p:sp>
       <p:sp>
         <p:nvSpPr>
-          <p:cNvPr id="14" name="Shape 12"/>
+          <p:cNvPr id="15" name="Shape 13"/>
           <p:cNvSpPr/>
           <p:nvPr/>
         </p:nvSpPr>
         <p:spPr>
           <a:xfrm>
-            <a:off x="548640" y="4114800"/>
+            <a:off x="548640" y="4443984"/>
             <a:ext cx="5394960" cy="1810512"/>
           </a:xfrm>
           <a:prstGeom prst="roundRect">
@@ -11687,13 +11999,13 @@
       </p:sp>
       <p:sp>
         <p:nvSpPr>
-          <p:cNvPr id="15" name="Shape 13"/>
+          <p:cNvPr id="16" name="Shape 14"/>
           <p:cNvSpPr/>
           <p:nvPr/>
         </p:nvSpPr>
         <p:spPr>
           <a:xfrm>
-            <a:off x="822960" y="4407408"/>
+            <a:off x="822960" y="4736592"/>
             <a:ext cx="548640" cy="548640"/>
           </a:xfrm>
           <a:prstGeom prst="ellipse">
@@ -11707,13 +12019,13 @@
       </p:sp>
       <p:sp>
         <p:nvSpPr>
-          <p:cNvPr id="16" name="Text 14"/>
-          <p:cNvSpPr txBox="1"/>
-          <p:nvPr/>
-        </p:nvSpPr>
-        <p:spPr>
-          <a:xfrm>
-            <a:off x="822960" y="4407408"/>
+          <p:cNvPr id="17" name="Text 15"/>
+          <p:cNvSpPr txBox="1"/>
+          <p:nvPr/>
+        </p:nvSpPr>
+        <p:spPr>
+          <a:xfrm>
+            <a:off x="822960" y="4736592"/>
             <a:ext cx="548640" cy="548640"/>
           </a:xfrm>
           <a:prstGeom prst="rect">
@@ -11746,13 +12058,13 @@
       </p:sp>
       <p:sp>
         <p:nvSpPr>
-          <p:cNvPr id="17" name="Text 15"/>
-          <p:cNvSpPr txBox="1"/>
-          <p:nvPr/>
-        </p:nvSpPr>
-        <p:spPr>
-          <a:xfrm>
-            <a:off x="1508760" y="4370832"/>
+          <p:cNvPr id="18" name="Text 16"/>
+          <p:cNvSpPr txBox="1"/>
+          <p:nvPr/>
+        </p:nvSpPr>
+        <p:spPr>
+          <a:xfrm>
+            <a:off x="1508760" y="4700016"/>
             <a:ext cx="4206240" cy="548640"/>
           </a:xfrm>
           <a:prstGeom prst="rect">
@@ -11785,13 +12097,13 @@
       </p:sp>
       <p:sp>
         <p:nvSpPr>
-          <p:cNvPr id="18" name="Text 16"/>
-          <p:cNvSpPr txBox="1"/>
-          <p:nvPr/>
-        </p:nvSpPr>
-        <p:spPr>
-          <a:xfrm>
-            <a:off x="822960" y="5029200"/>
+          <p:cNvPr id="19" name="Text 17"/>
+          <p:cNvSpPr txBox="1"/>
+          <p:nvPr/>
+        </p:nvSpPr>
+        <p:spPr>
+          <a:xfrm>
+            <a:off x="822960" y="5358384"/>
             <a:ext cx="4846320" cy="822960"/>
           </a:xfrm>
           <a:prstGeom prst="rect">
@@ -11824,13 +12136,13 @@
       </p:sp>
       <p:sp>
         <p:nvSpPr>
-          <p:cNvPr id="19" name="Shape 17"/>
+          <p:cNvPr id="20" name="Shape 18"/>
           <p:cNvSpPr/>
           <p:nvPr/>
         </p:nvSpPr>
         <p:spPr>
           <a:xfrm>
-            <a:off x="6245352" y="4114800"/>
+            <a:off x="6245352" y="4443984"/>
             <a:ext cx="5394960" cy="1810512"/>
           </a:xfrm>
           <a:prstGeom prst="roundRect">
@@ -11851,13 +12163,13 @@
       </p:sp>
       <p:sp>
         <p:nvSpPr>
-          <p:cNvPr id="20" name="Shape 18"/>
+          <p:cNvPr id="21" name="Shape 19"/>
           <p:cNvSpPr/>
           <p:nvPr/>
         </p:nvSpPr>
         <p:spPr>
           <a:xfrm>
-            <a:off x="6519672" y="4407408"/>
+            <a:off x="6519672" y="4736592"/>
             <a:ext cx="548640" cy="548640"/>
           </a:xfrm>
           <a:prstGeom prst="ellipse">
@@ -11871,13 +12183,13 @@
       </p:sp>
       <p:sp>
         <p:nvSpPr>
-          <p:cNvPr id="21" name="Text 19"/>
-          <p:cNvSpPr txBox="1"/>
-          <p:nvPr/>
-        </p:nvSpPr>
-        <p:spPr>
-          <a:xfrm>
-            <a:off x="6519672" y="4407408"/>
+          <p:cNvPr id="22" name="Text 20"/>
+          <p:cNvSpPr txBox="1"/>
+          <p:nvPr/>
+        </p:nvSpPr>
+        <p:spPr>
+          <a:xfrm>
+            <a:off x="6519672" y="4736592"/>
             <a:ext cx="548640" cy="548640"/>
           </a:xfrm>
           <a:prstGeom prst="rect">
@@ -11910,13 +12222,13 @@
       </p:sp>
       <p:sp>
         <p:nvSpPr>
-          <p:cNvPr id="22" name="Text 20"/>
-          <p:cNvSpPr txBox="1"/>
-          <p:nvPr/>
-        </p:nvSpPr>
-        <p:spPr>
-          <a:xfrm>
-            <a:off x="7205472" y="4370832"/>
+          <p:cNvPr id="23" name="Text 21"/>
+          <p:cNvSpPr txBox="1"/>
+          <p:nvPr/>
+        </p:nvSpPr>
+        <p:spPr>
+          <a:xfrm>
+            <a:off x="7205472" y="4700016"/>
             <a:ext cx="4206240" cy="548640"/>
           </a:xfrm>
           <a:prstGeom prst="rect">
@@ -11949,13 +12261,13 @@
       </p:sp>
       <p:sp>
         <p:nvSpPr>
-          <p:cNvPr id="23" name="Text 21"/>
-          <p:cNvSpPr txBox="1"/>
-          <p:nvPr/>
-        </p:nvSpPr>
-        <p:spPr>
-          <a:xfrm>
-            <a:off x="6519672" y="5029200"/>
+          <p:cNvPr id="24" name="Text 22"/>
+          <p:cNvSpPr txBox="1"/>
+          <p:nvPr/>
+        </p:nvSpPr>
+        <p:spPr>
+          <a:xfrm>
+            <a:off x="6519672" y="5358384"/>
             <a:ext cx="4846320" cy="822960"/>
           </a:xfrm>
           <a:prstGeom prst="rect">
@@ -11988,7 +12300,7 @@
       </p:sp>
       <p:sp>
         <p:nvSpPr>
-          <p:cNvPr id="24" name="Shape 22"/>
+          <p:cNvPr id="25" name="Shape 23"/>
           <p:cNvSpPr/>
           <p:nvPr/>
         </p:nvSpPr>
@@ -12010,7 +12322,7 @@
       </p:sp>
       <p:sp>
         <p:nvSpPr>
-          <p:cNvPr id="25" name="Text 23"/>
+          <p:cNvPr id="26" name="Text 24"/>
           <p:cNvSpPr txBox="1"/>
           <p:nvPr/>
         </p:nvSpPr>
@@ -12049,7 +12361,7 @@
       </p:sp>
       <p:sp>
         <p:nvSpPr>
-          <p:cNvPr id="26" name="Text 24"/>
+          <p:cNvPr id="27" name="Text 25"/>
           <p:cNvSpPr txBox="1"/>
           <p:nvPr/>
         </p:nvSpPr>
@@ -12088,7 +12400,7 @@
       </p:sp>
       <p:sp>
         <p:nvSpPr>
-          <p:cNvPr id="27" name="Text 25"/>
+          <p:cNvPr id="28" name="Text 26"/>
           <p:cNvSpPr txBox="1"/>
           <p:nvPr/>
         </p:nvSpPr>
